--- a/Reporte 160726.pptx
+++ b/Reporte 160726.pptx
@@ -6543,10 +6543,10 @@
       </p:sp>
       <p:pic>
         <p:nvPicPr>
-          <p:cNvPr id="5" name="Imagen 4">
+          <p:cNvPr id="4" name="Imagen 3">
             <a:extLst>
               <a:ext uri="{FF2B5EF4-FFF2-40B4-BE49-F238E27FC236}">
-                <a16:creationId xmlns:a16="http://schemas.microsoft.com/office/drawing/2014/main" id="{AFBF80C4-119F-1E35-A70F-08F2097E9F89}"/>
+                <a16:creationId xmlns:a16="http://schemas.microsoft.com/office/drawing/2014/main" id="{BC2D511C-FEAB-BF9D-13C0-63D52EF4B749}"/>
               </a:ext>
             </a:extLst>
           </p:cNvPr>
@@ -6563,8 +6563,8 @@
         </p:blipFill>
         <p:spPr>
           <a:xfrm>
-            <a:off x="0" y="852173"/>
-            <a:ext cx="9144000" cy="3582030"/>
+            <a:off x="0" y="887844"/>
+            <a:ext cx="9144000" cy="3510688"/>
           </a:xfrm>
           <a:prstGeom prst="rect">
             <a:avLst/>
@@ -6641,10 +6641,10 @@
       </p:sp>
       <p:pic>
         <p:nvPicPr>
-          <p:cNvPr id="3" name="Imagen 2">
+          <p:cNvPr id="4" name="Imagen 3">
             <a:extLst>
               <a:ext uri="{FF2B5EF4-FFF2-40B4-BE49-F238E27FC236}">
-                <a16:creationId xmlns:a16="http://schemas.microsoft.com/office/drawing/2014/main" id="{3E6EED79-E635-B253-9CE1-F345FA8B2FC1}"/>
+                <a16:creationId xmlns:a16="http://schemas.microsoft.com/office/drawing/2014/main" id="{4AFC1CD7-9DC7-670A-6A95-36E0625065E2}"/>
               </a:ext>
             </a:extLst>
           </p:cNvPr>
@@ -6661,8 +6661,8 @@
         </p:blipFill>
         <p:spPr>
           <a:xfrm>
-            <a:off x="0" y="1324244"/>
-            <a:ext cx="9144000" cy="2637887"/>
+            <a:off x="-6725" y="1326004"/>
+            <a:ext cx="9144000" cy="2634367"/>
           </a:xfrm>
           <a:prstGeom prst="rect">
             <a:avLst/>
@@ -6745,10 +6745,10 @@
       </p:sp>
       <p:pic>
         <p:nvPicPr>
-          <p:cNvPr id="3" name="Imagen 2">
+          <p:cNvPr id="4" name="Imagen 3">
             <a:extLst>
               <a:ext uri="{FF2B5EF4-FFF2-40B4-BE49-F238E27FC236}">
-                <a16:creationId xmlns:a16="http://schemas.microsoft.com/office/drawing/2014/main" id="{EE7E234C-BFAC-40E5-B1CC-F4199F078085}"/>
+                <a16:creationId xmlns:a16="http://schemas.microsoft.com/office/drawing/2014/main" id="{5B9B9FD7-6285-9EA0-EDB1-D97F23A8472D}"/>
               </a:ext>
             </a:extLst>
           </p:cNvPr>
@@ -6765,8 +6765,8 @@
         </p:blipFill>
         <p:spPr>
           <a:xfrm>
-            <a:off x="0" y="715317"/>
-            <a:ext cx="9144000" cy="3855742"/>
+            <a:off x="0" y="999195"/>
+            <a:ext cx="9144000" cy="3287985"/>
           </a:xfrm>
           <a:prstGeom prst="rect">
             <a:avLst/>
@@ -6843,10 +6843,10 @@
       </p:sp>
       <p:pic>
         <p:nvPicPr>
-          <p:cNvPr id="5" name="Imagen 4">
+          <p:cNvPr id="4" name="Imagen 3">
             <a:extLst>
               <a:ext uri="{FF2B5EF4-FFF2-40B4-BE49-F238E27FC236}">
-                <a16:creationId xmlns:a16="http://schemas.microsoft.com/office/drawing/2014/main" id="{FEC255DB-1623-E493-BE55-1608544106A4}"/>
+                <a16:creationId xmlns:a16="http://schemas.microsoft.com/office/drawing/2014/main" id="{80D77439-E368-C13B-3232-56047BE84771}"/>
               </a:ext>
             </a:extLst>
           </p:cNvPr>
@@ -6863,8 +6863,8 @@
         </p:blipFill>
         <p:spPr>
           <a:xfrm>
-            <a:off x="0" y="1268533"/>
-            <a:ext cx="9144000" cy="2749310"/>
+            <a:off x="0" y="1221684"/>
+            <a:ext cx="9144000" cy="2843008"/>
           </a:xfrm>
           <a:prstGeom prst="rect">
             <a:avLst/>
@@ -6941,10 +6941,10 @@
       </p:sp>
       <p:pic>
         <p:nvPicPr>
-          <p:cNvPr id="3" name="Imagen 2">
+          <p:cNvPr id="4" name="Imagen 3">
             <a:extLst>
               <a:ext uri="{FF2B5EF4-FFF2-40B4-BE49-F238E27FC236}">
-                <a16:creationId xmlns:a16="http://schemas.microsoft.com/office/drawing/2014/main" id="{FAA31499-0AD4-11C8-00E1-3AF85838A965}"/>
+                <a16:creationId xmlns:a16="http://schemas.microsoft.com/office/drawing/2014/main" id="{616DB45F-3E36-367A-995E-ADC164D595F9}"/>
               </a:ext>
             </a:extLst>
           </p:cNvPr>
@@ -6961,8 +6961,8 @@
         </p:blipFill>
         <p:spPr>
           <a:xfrm>
-            <a:off x="0" y="575082"/>
-            <a:ext cx="9144000" cy="4136211"/>
+            <a:off x="0" y="732463"/>
+            <a:ext cx="9144000" cy="3821449"/>
           </a:xfrm>
           <a:prstGeom prst="rect">
             <a:avLst/>
@@ -7039,10 +7039,10 @@
       </p:sp>
       <p:pic>
         <p:nvPicPr>
-          <p:cNvPr id="3" name="Imagen 2">
+          <p:cNvPr id="4" name="Imagen 3">
             <a:extLst>
               <a:ext uri="{FF2B5EF4-FFF2-40B4-BE49-F238E27FC236}">
-                <a16:creationId xmlns:a16="http://schemas.microsoft.com/office/drawing/2014/main" id="{8C6B1847-18EC-BF54-9C6D-8C55415D1B96}"/>
+                <a16:creationId xmlns:a16="http://schemas.microsoft.com/office/drawing/2014/main" id="{FCA64EE3-E937-A910-7996-471F07553C28}"/>
               </a:ext>
             </a:extLst>
           </p:cNvPr>
@@ -7059,8 +7059,8 @@
         </p:blipFill>
         <p:spPr>
           <a:xfrm>
-            <a:off x="424877" y="347342"/>
-            <a:ext cx="8221222" cy="4591691"/>
+            <a:off x="0" y="1326873"/>
+            <a:ext cx="9144000" cy="2632630"/>
           </a:xfrm>
           <a:prstGeom prst="rect">
             <a:avLst/>
@@ -7211,6 +7211,36 @@
           </a:p>
         </p:txBody>
       </p:sp>
+      <p:pic>
+        <p:nvPicPr>
+          <p:cNvPr id="3" name="Imagen 2">
+            <a:extLst>
+              <a:ext uri="{FF2B5EF4-FFF2-40B4-BE49-F238E27FC236}">
+                <a16:creationId xmlns:a16="http://schemas.microsoft.com/office/drawing/2014/main" id="{7FBF114E-EDA8-F0D2-F854-510408CE1BFE}"/>
+              </a:ext>
+            </a:extLst>
+          </p:cNvPr>
+          <p:cNvPicPr>
+            <a:picLocks noChangeAspect="1"/>
+          </p:cNvPicPr>
+          <p:nvPr/>
+        </p:nvPicPr>
+        <p:blipFill>
+          <a:blip r:embed="rId3"/>
+          <a:stretch>
+            <a:fillRect/>
+          </a:stretch>
+        </p:blipFill>
+        <p:spPr>
+          <a:xfrm>
+            <a:off x="0" y="949672"/>
+            <a:ext cx="9144000" cy="3387032"/>
+          </a:xfrm>
+          <a:prstGeom prst="rect">
+            <a:avLst/>
+          </a:prstGeom>
+        </p:spPr>
+      </p:pic>
     </p:spTree>
     <p:extLst>
       <p:ext uri="{BB962C8B-B14F-4D97-AF65-F5344CB8AC3E}">
@@ -7295,6 +7325,36 @@
           </a:p>
         </p:txBody>
       </p:sp>
+      <p:pic>
+        <p:nvPicPr>
+          <p:cNvPr id="4" name="Imagen 3">
+            <a:extLst>
+              <a:ext uri="{FF2B5EF4-FFF2-40B4-BE49-F238E27FC236}">
+                <a16:creationId xmlns:a16="http://schemas.microsoft.com/office/drawing/2014/main" id="{C4ADF492-5A33-41E7-393D-A83507E15873}"/>
+              </a:ext>
+            </a:extLst>
+          </p:cNvPr>
+          <p:cNvPicPr>
+            <a:picLocks noChangeAspect="1"/>
+          </p:cNvPicPr>
+          <p:nvPr/>
+        </p:nvPicPr>
+        <p:blipFill>
+          <a:blip r:embed="rId3"/>
+          <a:stretch>
+            <a:fillRect/>
+          </a:stretch>
+        </p:blipFill>
+        <p:spPr>
+          <a:xfrm>
+            <a:off x="0" y="1411405"/>
+            <a:ext cx="9144000" cy="2463565"/>
+          </a:xfrm>
+          <a:prstGeom prst="rect">
+            <a:avLst/>
+          </a:prstGeom>
+        </p:spPr>
+      </p:pic>
     </p:spTree>
     <p:extLst>
       <p:ext uri="{BB962C8B-B14F-4D97-AF65-F5344CB8AC3E}">
@@ -7379,6 +7439,36 @@
           </a:p>
         </p:txBody>
       </p:sp>
+      <p:pic>
+        <p:nvPicPr>
+          <p:cNvPr id="3" name="Imagen 2">
+            <a:extLst>
+              <a:ext uri="{FF2B5EF4-FFF2-40B4-BE49-F238E27FC236}">
+                <a16:creationId xmlns:a16="http://schemas.microsoft.com/office/drawing/2014/main" id="{4A6E16D0-4122-C6A9-48D5-7814909C15E9}"/>
+              </a:ext>
+            </a:extLst>
+          </p:cNvPr>
+          <p:cNvPicPr>
+            <a:picLocks noChangeAspect="1"/>
+          </p:cNvPicPr>
+          <p:nvPr/>
+        </p:nvPicPr>
+        <p:blipFill>
+          <a:blip r:embed="rId3"/>
+          <a:stretch>
+            <a:fillRect/>
+          </a:stretch>
+        </p:blipFill>
+        <p:spPr>
+          <a:xfrm>
+            <a:off x="1106488" y="914940"/>
+            <a:ext cx="6858000" cy="3456495"/>
+          </a:xfrm>
+          <a:prstGeom prst="rect">
+            <a:avLst/>
+          </a:prstGeom>
+        </p:spPr>
+      </p:pic>
     </p:spTree>
     <p:extLst>
       <p:ext uri="{BB962C8B-B14F-4D97-AF65-F5344CB8AC3E}">
@@ -7459,6 +7549,36 @@
           </a:p>
         </p:txBody>
       </p:sp>
+      <p:pic>
+        <p:nvPicPr>
+          <p:cNvPr id="3" name="Imagen 2">
+            <a:extLst>
+              <a:ext uri="{FF2B5EF4-FFF2-40B4-BE49-F238E27FC236}">
+                <a16:creationId xmlns:a16="http://schemas.microsoft.com/office/drawing/2014/main" id="{E1361FE3-63EB-9546-53F7-5D8919502C35}"/>
+              </a:ext>
+            </a:extLst>
+          </p:cNvPr>
+          <p:cNvPicPr>
+            <a:picLocks noChangeAspect="1"/>
+          </p:cNvPicPr>
+          <p:nvPr/>
+        </p:nvPicPr>
+        <p:blipFill>
+          <a:blip r:embed="rId3"/>
+          <a:stretch>
+            <a:fillRect/>
+          </a:stretch>
+        </p:blipFill>
+        <p:spPr>
+          <a:xfrm>
+            <a:off x="1563273" y="885580"/>
+            <a:ext cx="5944430" cy="3515216"/>
+          </a:xfrm>
+          <a:prstGeom prst="rect">
+            <a:avLst/>
+          </a:prstGeom>
+        </p:spPr>
+      </p:pic>
     </p:spTree>
     <p:extLst>
       <p:ext uri="{BB962C8B-B14F-4D97-AF65-F5344CB8AC3E}">
@@ -7545,10 +7665,10 @@
       </p:sp>
       <p:pic>
         <p:nvPicPr>
-          <p:cNvPr id="4" name="Imagen 3">
+          <p:cNvPr id="3" name="Imagen 2">
             <a:extLst>
               <a:ext uri="{FF2B5EF4-FFF2-40B4-BE49-F238E27FC236}">
-                <a16:creationId xmlns:a16="http://schemas.microsoft.com/office/drawing/2014/main" id="{D8F9BE56-D19F-F48C-E647-40E90BBE1721}"/>
+                <a16:creationId xmlns:a16="http://schemas.microsoft.com/office/drawing/2014/main" id="{860F298F-3507-D839-854F-8728769C4568}"/>
               </a:ext>
             </a:extLst>
           </p:cNvPr>
@@ -7565,8 +7685,8 @@
         </p:blipFill>
         <p:spPr>
           <a:xfrm>
-            <a:off x="0" y="912839"/>
-            <a:ext cx="9144000" cy="3460698"/>
+            <a:off x="0" y="937661"/>
+            <a:ext cx="9144000" cy="3411054"/>
           </a:xfrm>
           <a:prstGeom prst="rect">
             <a:avLst/>
@@ -7659,10 +7779,10 @@
       </p:sp>
       <p:pic>
         <p:nvPicPr>
-          <p:cNvPr id="2" name="Imagen 1">
+          <p:cNvPr id="3" name="Imagen 2">
             <a:extLst>
               <a:ext uri="{FF2B5EF4-FFF2-40B4-BE49-F238E27FC236}">
-                <a16:creationId xmlns:a16="http://schemas.microsoft.com/office/drawing/2014/main" id="{29A3F298-0A70-E067-F779-A537E3FC4C2D}"/>
+                <a16:creationId xmlns:a16="http://schemas.microsoft.com/office/drawing/2014/main" id="{40B1FAAA-099B-AD7A-CDDD-B1DC4A5AB8FB}"/>
               </a:ext>
             </a:extLst>
           </p:cNvPr>
@@ -7679,7 +7799,7 @@
         </p:blipFill>
         <p:spPr>
           <a:xfrm>
-            <a:off x="1106488" y="914940"/>
+            <a:off x="1143000" y="914940"/>
             <a:ext cx="6858000" cy="3456495"/>
           </a:xfrm>
           <a:prstGeom prst="rect">
@@ -7773,10 +7893,10 @@
       </p:sp>
       <p:pic>
         <p:nvPicPr>
-          <p:cNvPr id="2" name="Imagen 1">
+          <p:cNvPr id="3" name="Imagen 2">
             <a:extLst>
               <a:ext uri="{FF2B5EF4-FFF2-40B4-BE49-F238E27FC236}">
-                <a16:creationId xmlns:a16="http://schemas.microsoft.com/office/drawing/2014/main" id="{6426806D-833B-145D-9E67-83AB1883FD40}"/>
+                <a16:creationId xmlns:a16="http://schemas.microsoft.com/office/drawing/2014/main" id="{8560DC31-20E7-C531-A345-72815EB7F125}"/>
               </a:ext>
             </a:extLst>
           </p:cNvPr>
@@ -7793,8 +7913,8 @@
         </p:blipFill>
         <p:spPr>
           <a:xfrm>
-            <a:off x="570732" y="644914"/>
-            <a:ext cx="7929512" cy="3996547"/>
+            <a:off x="1143000" y="914940"/>
+            <a:ext cx="6858000" cy="3456495"/>
           </a:xfrm>
           <a:prstGeom prst="rect">
             <a:avLst/>
@@ -7883,10 +8003,10 @@
       </p:sp>
       <p:pic>
         <p:nvPicPr>
-          <p:cNvPr id="4" name="Imagen 3">
+          <p:cNvPr id="3" name="Imagen 2">
             <a:extLst>
               <a:ext uri="{FF2B5EF4-FFF2-40B4-BE49-F238E27FC236}">
-                <a16:creationId xmlns:a16="http://schemas.microsoft.com/office/drawing/2014/main" id="{CF59EF23-A4CB-640D-31A1-75EE2FE608A0}"/>
+                <a16:creationId xmlns:a16="http://schemas.microsoft.com/office/drawing/2014/main" id="{C9C7A9D4-70F9-BE82-D11E-3CB1F6D8C0F8}"/>
               </a:ext>
             </a:extLst>
           </p:cNvPr>
@@ -7903,8 +8023,8 @@
         </p:blipFill>
         <p:spPr>
           <a:xfrm>
-            <a:off x="0" y="1057771"/>
-            <a:ext cx="9144000" cy="3170834"/>
+            <a:off x="543956" y="1352370"/>
+            <a:ext cx="7983064" cy="2581635"/>
           </a:xfrm>
           <a:prstGeom prst="rect">
             <a:avLst/>
